--- a/booklets/presentation/presentation_AresGuard.pptx
+++ b/booklets/presentation/presentation_AresGuard.pptx
@@ -11471,23 +11471,7 @@
                   <a:srgbClr val="FFFFFF"/>
                 </a:solidFill>
               </a:rPr>
-              <a:t>. The habitat's automation stack is partially destroyed and </a:t>
-            </a:r>
-            <a:r>
-              <a:rPr lang="en-US" sz="1900" dirty="0" err="1">
-                <a:solidFill>
-                  <a:srgbClr val="FFFFFF"/>
-                </a:solidFill>
-              </a:rPr>
-              <a:t>unstable.Life</a:t>
-            </a:r>
-            <a:r>
-              <a:rPr lang="en-US" sz="1900" dirty="0">
-                <a:solidFill>
-                  <a:srgbClr val="FFFFFF"/>
-                </a:solidFill>
-              </a:rPr>
-              <a:t>-support relies on manual polling of heterogeneous sensors. Without intervention, the crew faces a thermodynamic collapse.</a:t>
+              <a:t>. The habitat's automation stack is partially destroyed and unstable. Life-support relies on manual polling of heterogeneous sensors. Without intervention, the crew faces a thermodynamic collapse.</a:t>
             </a:r>
           </a:p>
           <a:p>
@@ -12711,7 +12695,7 @@
                     <a:schemeClr val="bg1"/>
                   </a:solidFill>
                 </a:rPr>
-                <a:t>Telemetry streaming omitted as per 	           mission guidelines.</a:t>
+                <a:t>Telemetry streaming omitted as per 	          mission guidelines.</a:t>
               </a:r>
             </a:p>
             <a:p>
